--- a/docs/magnetometry.pptx
+++ b/docs/magnetometry.pptx
@@ -268,7 +268,7 @@
           <a:p>
             <a:fld id="{66BEE5B1-6936-794A-8F06-73F0C7D564DD}" type="datetimeFigureOut">
               <a:rPr lang="en-HU" smtClean="0"/>
-              <a:t>2026. 08. 20.</a:t>
+              <a:t>2026. 08. 21.</a:t>
             </a:fld>
             <a:endParaRPr lang="en-HU"/>
           </a:p>
@@ -468,7 +468,7 @@
           <a:p>
             <a:fld id="{66BEE5B1-6936-794A-8F06-73F0C7D564DD}" type="datetimeFigureOut">
               <a:rPr lang="en-HU" smtClean="0"/>
-              <a:t>2026. 08. 20.</a:t>
+              <a:t>2026. 08. 21.</a:t>
             </a:fld>
             <a:endParaRPr lang="en-HU"/>
           </a:p>
@@ -678,7 +678,7 @@
           <a:p>
             <a:fld id="{66BEE5B1-6936-794A-8F06-73F0C7D564DD}" type="datetimeFigureOut">
               <a:rPr lang="en-HU" smtClean="0"/>
-              <a:t>2026. 08. 20.</a:t>
+              <a:t>2026. 08. 21.</a:t>
             </a:fld>
             <a:endParaRPr lang="en-HU"/>
           </a:p>
@@ -878,7 +878,7 @@
           <a:p>
             <a:fld id="{66BEE5B1-6936-794A-8F06-73F0C7D564DD}" type="datetimeFigureOut">
               <a:rPr lang="en-HU" smtClean="0"/>
-              <a:t>2026. 08. 20.</a:t>
+              <a:t>2026. 08. 21.</a:t>
             </a:fld>
             <a:endParaRPr lang="en-HU"/>
           </a:p>
@@ -1154,7 +1154,7 @@
           <a:p>
             <a:fld id="{66BEE5B1-6936-794A-8F06-73F0C7D564DD}" type="datetimeFigureOut">
               <a:rPr lang="en-HU" smtClean="0"/>
-              <a:t>2026. 08. 20.</a:t>
+              <a:t>2026. 08. 21.</a:t>
             </a:fld>
             <a:endParaRPr lang="en-HU"/>
           </a:p>
@@ -1422,7 +1422,7 @@
           <a:p>
             <a:fld id="{66BEE5B1-6936-794A-8F06-73F0C7D564DD}" type="datetimeFigureOut">
               <a:rPr lang="en-HU" smtClean="0"/>
-              <a:t>2026. 08. 20.</a:t>
+              <a:t>2026. 08. 21.</a:t>
             </a:fld>
             <a:endParaRPr lang="en-HU"/>
           </a:p>
@@ -1837,7 +1837,7 @@
           <a:p>
             <a:fld id="{66BEE5B1-6936-794A-8F06-73F0C7D564DD}" type="datetimeFigureOut">
               <a:rPr lang="en-HU" smtClean="0"/>
-              <a:t>2026. 08. 20.</a:t>
+              <a:t>2026. 08. 21.</a:t>
             </a:fld>
             <a:endParaRPr lang="en-HU"/>
           </a:p>
@@ -1979,7 +1979,7 @@
           <a:p>
             <a:fld id="{66BEE5B1-6936-794A-8F06-73F0C7D564DD}" type="datetimeFigureOut">
               <a:rPr lang="en-HU" smtClean="0"/>
-              <a:t>2026. 08. 20.</a:t>
+              <a:t>2026. 08. 21.</a:t>
             </a:fld>
             <a:endParaRPr lang="en-HU"/>
           </a:p>
@@ -2092,7 +2092,7 @@
           <a:p>
             <a:fld id="{66BEE5B1-6936-794A-8F06-73F0C7D564DD}" type="datetimeFigureOut">
               <a:rPr lang="en-HU" smtClean="0"/>
-              <a:t>2026. 08. 20.</a:t>
+              <a:t>2026. 08. 21.</a:t>
             </a:fld>
             <a:endParaRPr lang="en-HU"/>
           </a:p>
@@ -2405,7 +2405,7 @@
           <a:p>
             <a:fld id="{66BEE5B1-6936-794A-8F06-73F0C7D564DD}" type="datetimeFigureOut">
               <a:rPr lang="en-HU" smtClean="0"/>
-              <a:t>2026. 08. 20.</a:t>
+              <a:t>2026. 08. 21.</a:t>
             </a:fld>
             <a:endParaRPr lang="en-HU"/>
           </a:p>
@@ -2694,7 +2694,7 @@
           <a:p>
             <a:fld id="{66BEE5B1-6936-794A-8F06-73F0C7D564DD}" type="datetimeFigureOut">
               <a:rPr lang="en-HU" smtClean="0"/>
-              <a:t>2026. 08. 20.</a:t>
+              <a:t>2026. 08. 21.</a:t>
             </a:fld>
             <a:endParaRPr lang="en-HU"/>
           </a:p>
@@ -2937,7 +2937,7 @@
           <a:p>
             <a:fld id="{66BEE5B1-6936-794A-8F06-73F0C7D564DD}" type="datetimeFigureOut">
               <a:rPr lang="en-HU" smtClean="0"/>
-              <a:t>2026. 08. 20.</a:t>
+              <a:t>2026. 08. 21.</a:t>
             </a:fld>
             <a:endParaRPr lang="en-HU"/>
           </a:p>
@@ -5429,10 +5429,10 @@
       </p:cxnSp>
       <p:pic>
         <p:nvPicPr>
-          <p:cNvPr id="3" name="Picture 2">
-            <a:extLst>
-              <a:ext uri="{FF2B5EF4-FFF2-40B4-BE49-F238E27FC236}">
-                <a16:creationId xmlns:a16="http://schemas.microsoft.com/office/drawing/2014/main" id="{2F163643-599B-E8FC-0B2D-54D5224DDD61}"/>
+          <p:cNvPr id="5" name="Picture 4">
+            <a:extLst>
+              <a:ext uri="{FF2B5EF4-FFF2-40B4-BE49-F238E27FC236}">
+                <a16:creationId xmlns:a16="http://schemas.microsoft.com/office/drawing/2014/main" id="{CE625267-AFFF-DD12-5ADE-1C92C9DE75D2}"/>
               </a:ext>
             </a:extLst>
           </p:cNvPr>
@@ -5449,8 +5449,8 @@
         </p:blipFill>
         <p:spPr>
           <a:xfrm>
-            <a:off x="2324099" y="48569"/>
-            <a:ext cx="7606709" cy="6287701"/>
+            <a:off x="1963862" y="1"/>
+            <a:ext cx="7672507" cy="6366928"/>
           </a:xfrm>
           <a:prstGeom prst="rect">
             <a:avLst/>
